--- a/deliverables/Fiserv_Crypto_Strategy_Investor_Day.pptx
+++ b/deliverables/Fiserv_Crypto_Strategy_Investor_Day.pptx
@@ -321,7 +321,7 @@
           <a:p>
             <a:fld id="{5BCAD085-E8A6-8845-BD4E-CB4CCA059FC4}" type="datetimeFigureOut">
               <a:rPr lang="en-US" smtClean="0"/>
-              <a:t>4/3/26</a:t>
+              <a:t>4/4/26</a:t>
             </a:fld>
             <a:endParaRPr lang="en-US"/>
           </a:p>
@@ -489,7 +489,7 @@
           <a:p>
             <a:fld id="{5BCAD085-E8A6-8845-BD4E-CB4CCA059FC4}" type="datetimeFigureOut">
               <a:rPr lang="en-US" smtClean="0"/>
-              <a:t>4/3/26</a:t>
+              <a:t>4/4/26</a:t>
             </a:fld>
             <a:endParaRPr lang="en-US"/>
           </a:p>
@@ -667,7 +667,7 @@
           <a:p>
             <a:fld id="{5BCAD085-E8A6-8845-BD4E-CB4CCA059FC4}" type="datetimeFigureOut">
               <a:rPr lang="en-US" smtClean="0"/>
-              <a:t>4/3/26</a:t>
+              <a:t>4/4/26</a:t>
             </a:fld>
             <a:endParaRPr lang="en-US"/>
           </a:p>
@@ -835,7 +835,7 @@
           <a:p>
             <a:fld id="{5BCAD085-E8A6-8845-BD4E-CB4CCA059FC4}" type="datetimeFigureOut">
               <a:rPr lang="en-US" smtClean="0"/>
-              <a:t>4/3/26</a:t>
+              <a:t>4/4/26</a:t>
             </a:fld>
             <a:endParaRPr lang="en-US"/>
           </a:p>
@@ -1080,7 +1080,7 @@
           <a:p>
             <a:fld id="{5BCAD085-E8A6-8845-BD4E-CB4CCA059FC4}" type="datetimeFigureOut">
               <a:rPr lang="en-US" smtClean="0"/>
-              <a:t>4/3/26</a:t>
+              <a:t>4/4/26</a:t>
             </a:fld>
             <a:endParaRPr lang="en-US"/>
           </a:p>
@@ -1365,7 +1365,7 @@
           <a:p>
             <a:fld id="{5BCAD085-E8A6-8845-BD4E-CB4CCA059FC4}" type="datetimeFigureOut">
               <a:rPr lang="en-US" smtClean="0"/>
-              <a:t>4/3/26</a:t>
+              <a:t>4/4/26</a:t>
             </a:fld>
             <a:endParaRPr lang="en-US"/>
           </a:p>
@@ -1784,7 +1784,7 @@
           <a:p>
             <a:fld id="{5BCAD085-E8A6-8845-BD4E-CB4CCA059FC4}" type="datetimeFigureOut">
               <a:rPr lang="en-US" smtClean="0"/>
-              <a:t>4/3/26</a:t>
+              <a:t>4/4/26</a:t>
             </a:fld>
             <a:endParaRPr lang="en-US"/>
           </a:p>
@@ -1901,7 +1901,7 @@
           <a:p>
             <a:fld id="{5BCAD085-E8A6-8845-BD4E-CB4CCA059FC4}" type="datetimeFigureOut">
               <a:rPr lang="en-US" smtClean="0"/>
-              <a:t>4/3/26</a:t>
+              <a:t>4/4/26</a:t>
             </a:fld>
             <a:endParaRPr lang="en-US"/>
           </a:p>
@@ -1996,7 +1996,7 @@
           <a:p>
             <a:fld id="{5BCAD085-E8A6-8845-BD4E-CB4CCA059FC4}" type="datetimeFigureOut">
               <a:rPr lang="en-US" smtClean="0"/>
-              <a:t>4/3/26</a:t>
+              <a:t>4/4/26</a:t>
             </a:fld>
             <a:endParaRPr lang="en-US"/>
           </a:p>
@@ -2271,7 +2271,7 @@
           <a:p>
             <a:fld id="{5BCAD085-E8A6-8845-BD4E-CB4CCA059FC4}" type="datetimeFigureOut">
               <a:rPr lang="en-US" smtClean="0"/>
-              <a:t>4/3/26</a:t>
+              <a:t>4/4/26</a:t>
             </a:fld>
             <a:endParaRPr lang="en-US"/>
           </a:p>
@@ -2523,7 +2523,7 @@
           <a:p>
             <a:fld id="{5BCAD085-E8A6-8845-BD4E-CB4CCA059FC4}" type="datetimeFigureOut">
               <a:rPr lang="en-US" smtClean="0"/>
-              <a:t>4/3/26</a:t>
+              <a:t>4/4/26</a:t>
             </a:fld>
             <a:endParaRPr lang="en-US"/>
           </a:p>
@@ -2734,7 +2734,7 @@
           <a:p>
             <a:fld id="{5BCAD085-E8A6-8845-BD4E-CB4CCA059FC4}" type="datetimeFigureOut">
               <a:rPr lang="en-US" smtClean="0"/>
-              <a:t>4/3/26</a:t>
+              <a:t>4/4/26</a:t>
             </a:fld>
             <a:endParaRPr lang="en-US"/>
           </a:p>
@@ -17670,11 +17670,17 @@
           <p:cNvGraphicFramePr>
             <a:graphicFrameLocks noGrp="1"/>
           </p:cNvGraphicFramePr>
-          <p:nvPr/>
+          <p:nvPr>
+            <p:extLst>
+              <p:ext uri="{D42A27DB-BD31-4B8C-83A1-F6EECF244321}">
+                <p14:modId xmlns:p14="http://schemas.microsoft.com/office/powerpoint/2010/main" val="1631919002"/>
+              </p:ext>
+            </p:extLst>
+          </p:nvPr>
         </p:nvGraphicFramePr>
         <p:xfrm>
-          <a:off x="731520" y="1828800"/>
-          <a:ext cx="5486400" cy="2286000"/>
+          <a:off x="579120" y="1828799"/>
+          <a:ext cx="6126480" cy="2304290"/>
         </p:xfrm>
         <a:graphic>
           <a:graphicData uri="http://schemas.openxmlformats.org/drawingml/2006/table">
@@ -17683,28 +17689,28 @@
                 <a:tableStyleId>{5C22544A-7EE6-4342-B048-85BDC9FD1C3A}</a:tableStyleId>
               </a:tblPr>
               <a:tblGrid>
-                <a:gridCol w="1371600">
+                <a:gridCol w="1531620">
                   <a:extLst>
                     <a:ext uri="{9D8B030D-6E8A-4147-A177-3AD203B41FA5}">
                       <a16:colId xmlns:a16="http://schemas.microsoft.com/office/drawing/2014/main" val="20000"/>
                     </a:ext>
                   </a:extLst>
                 </a:gridCol>
-                <a:gridCol w="1371600">
+                <a:gridCol w="1531620">
                   <a:extLst>
                     <a:ext uri="{9D8B030D-6E8A-4147-A177-3AD203B41FA5}">
                       <a16:colId xmlns:a16="http://schemas.microsoft.com/office/drawing/2014/main" val="20001"/>
                     </a:ext>
                   </a:extLst>
                 </a:gridCol>
-                <a:gridCol w="1371600">
+                <a:gridCol w="1531620">
                   <a:extLst>
                     <a:ext uri="{9D8B030D-6E8A-4147-A177-3AD203B41FA5}">
                       <a16:colId xmlns:a16="http://schemas.microsoft.com/office/drawing/2014/main" val="20002"/>
                     </a:ext>
                   </a:extLst>
                 </a:gridCol>
-                <a:gridCol w="1371600">
+                <a:gridCol w="1531620">
                   <a:extLst>
                     <a:ext uri="{9D8B030D-6E8A-4147-A177-3AD203B41FA5}">
                       <a16:colId xmlns:a16="http://schemas.microsoft.com/office/drawing/2014/main" val="20003"/>
@@ -17712,7 +17718,7 @@
                   </a:extLst>
                 </a:gridCol>
               </a:tblGrid>
-              <a:tr h="457200">
+              <a:tr h="460858">
                 <a:tc>
                   <a:txBody>
                     <a:bodyPr/>
@@ -17815,7 +17821,7 @@
                   </a:ext>
                 </a:extLst>
               </a:tr>
-              <a:tr h="457200">
+              <a:tr h="460858">
                 <a:tc>
                   <a:txBody>
                     <a:bodyPr/>
@@ -17830,6 +17836,7 @@
                         </a:defRPr>
                       </a:pPr>
                       <a:r>
+                        <a:rPr dirty="0"/>
                         <a:t>Stablecoin Market Cap</a:t>
                       </a:r>
                     </a:p>
@@ -17918,7 +17925,7 @@
                   </a:ext>
                 </a:extLst>
               </a:tr>
-              <a:tr h="457200">
+              <a:tr h="460858">
                 <a:tc>
                   <a:txBody>
                     <a:bodyPr/>
@@ -18021,7 +18028,7 @@
                   </a:ext>
                 </a:extLst>
               </a:tr>
-              <a:tr h="457200">
+              <a:tr h="460858">
                 <a:tc>
                   <a:txBody>
                     <a:bodyPr/>
@@ -18124,7 +18131,7 @@
                   </a:ext>
                 </a:extLst>
               </a:tr>
-              <a:tr h="457200">
+              <a:tr h="460858">
                 <a:tc>
                   <a:txBody>
                     <a:bodyPr/>
@@ -18211,6 +18218,7 @@
                         </a:defRPr>
                       </a:pPr>
                       <a:r>
+                        <a:rPr dirty="0"/>
                         <a:t>~25%</a:t>
                       </a:r>
                     </a:p>
@@ -18739,8 +18747,8 @@
         </p:nvSpPr>
         <p:spPr>
           <a:xfrm>
-            <a:off x="731520" y="5303520"/>
-            <a:ext cx="10698480" cy="1097280"/>
+            <a:off x="579120" y="4709160"/>
+            <a:ext cx="6126480" cy="1097280"/>
           </a:xfrm>
           <a:prstGeom prst="roundRect">
             <a:avLst/>
@@ -18771,7 +18779,7 @@
           <a:lstStyle/>
           <a:p>
             <a:pPr algn="ctr"/>
-            <a:endParaRPr/>
+            <a:endParaRPr dirty="0"/>
           </a:p>
         </p:txBody>
       </p:sp>
@@ -18783,7 +18791,7 @@
         </p:nvSpPr>
         <p:spPr>
           <a:xfrm>
-            <a:off x="1097280" y="5440680"/>
+            <a:off x="-1386840" y="4937760"/>
             <a:ext cx="10058400" cy="822960"/>
           </a:xfrm>
           <a:prstGeom prst="rect">

--- a/deliverables/Fiserv_Crypto_Strategy_Investor_Day.pptx
+++ b/deliverables/Fiserv_Crypto_Strategy_Investor_Day.pptx
@@ -23027,7 +23027,7 @@
             </a:r>
             <a:br/>
             <a:r>
-              <a:t>$370B custody, SOC 2</a:t>
+              <a:t>$300B custody, SOC 2</a:t>
             </a:r>
             <a:br/>
             <a:r>
@@ -26391,7 +26391,7 @@
               </a:defRPr>
             </a:pPr>
             <a:r>
-              <a:t>Coinbase is the only provider with both SOC 1 and SOC 2 Type II certifications audited by a Big Four firm (Deloitte), plus $320M insurance via Lloyd's of London.</a:t>
+              <a:t>Coinbase is the only provider with both SOC 1 and SOC 2 Type II certifications audited by a Big Four firm (Deloitte), plus $320M insurance via commercial crime.</a:t>
             </a:r>
           </a:p>
         </p:txBody>
